--- a/week-05/presentations/ppts/day-04-high-level-technical-modeling.pptx
+++ b/week-05/presentations/ppts/day-04-high-level-technical-modeling.pptx
@@ -1447,7 +1447,7 @@
             </a:pPr>
             <a:r>
               <a:rPr/>
-              <a:t>By 16:00, every triad has TMD §4 with three sequence diagrams.</a:t>
+              <a:t>By 16:00, every triad has TMD Section 4 with three sequence diagrams.</a:t>
             </a:r>
           </a:p>
         </p:txBody>
@@ -2185,7 +2185,7 @@
             </a:pPr>
             <a:r>
               <a:rPr/>
-              <a:t>Sad paths come from PRD §6 — validation, permission, state conflict are the usual three. Mark the divergence point clearly; that’s where review attention belongs.</a:t>
+              <a:t>Sad paths come from PRD Section 6 — validation, permission, state conflict are the usual three. Mark the divergence point clearly; that’s where review attention belongs.</a:t>
             </a:r>
           </a:p>
         </p:txBody>
@@ -5357,7 +5357,7 @@
             </a:pPr>
             <a:r>
               <a:rPr/>
-              <a:t>Pick from PRD §6 sad-path AC</a:t>
+              <a:t>Pick from PRD Section 6 sad-path AC</a:t>
             </a:r>
           </a:p>
           <a:p>
@@ -5375,7 +5375,7 @@
             </a:pPr>
             <a:r>
               <a:rPr/>
-              <a:t>Show the status code + error body from §3</a:t>
+              <a:t>Show the status code + error body from Section 3</a:t>
             </a:r>
           </a:p>
           <a:p>
@@ -5669,7 +5669,7 @@
             </a:pPr>
             <a:r>
               <a:rPr/>
-              <a:t>Pick from PRD §6 weird-path AC</a:t>
+              <a:t>Pick from PRD Section 6 weird-path AC</a:t>
             </a:r>
           </a:p>
           <a:p>
@@ -6010,7 +6010,7 @@
             </a:pPr>
             <a:r>
               <a:rPr/>
-              <a:t>Happy path: does latency add up? Protocols consistent with §3?</a:t>
+              <a:t>Happy path: does latency add up? Protocols consistent with Section 3?</a:t>
             </a:r>
           </a:p>
           <a:p>
@@ -6075,7 +6075,7 @@
             </a:pPr>
             <a:r>
               <a:rPr/>
-              <a:t>🧿 AI Critique Prompt</a:t>
+              <a:t>🤖 AI Critique Prompt</a:t>
             </a:r>
           </a:p>
         </p:txBody>
@@ -6261,7 +6261,7 @@
             </a:pPr>
             <a:r>
               <a:rPr/>
-              <a:t>5 min: update §4 + provenance</a:t>
+              <a:t>5 min: update Section 4 + provenance</a:t>
             </a:r>
           </a:p>
           <a:p>
@@ -6387,7 +6387,7 @@
             </a:pPr>
             <a:r>
               <a:rPr/>
-              <a:t>TMD §4 drafted</a:t>
+              <a:t>TMD Section 4 drafted</a:t>
             </a:r>
           </a:p>
           <a:p>
@@ -6432,7 +6432,7 @@
             </a:pPr>
             <a:r>
               <a:rPr/>
-              <a:t>Bring to Day 5: TMD §§1–4. Friday adds §5 and assembles the full TMD.</a:t>
+              <a:t>Bring to Day 5: TMD Sections 1–4. Friday adds Section 5 and assembles the full TMD.</a:t>
             </a:r>
           </a:p>
         </p:txBody>
@@ -6606,7 +6606,7 @@
             </a:pPr>
             <a:r>
               <a:rPr/>
-              <a:t>Verify total latency annotation matches TCD §4 SLO budget</a:t>
+              <a:t>Verify total latency annotation matches TCD Section 4 SLO budget</a:t>
             </a:r>
           </a:p>
           <a:p>
@@ -6732,7 +6732,7 @@
             </a:pPr>
             <a:r>
               <a:rPr/>
-              <a:t>Pin TMD §§1–3; whiteboards out</a:t>
+              <a:t>Pin TMD Sections 1–3; whiteboards out</a:t>
             </a:r>
           </a:p>
           <a:p>
@@ -7295,7 +7295,7 @@
             </a:pPr>
             <a:r>
               <a:rPr/>
-              <a:t>📚 Three Sequences in TMD §4</a:t>
+              <a:t>📚 Three Sequences in TMD Section 4</a:t>
             </a:r>
           </a:p>
         </p:txBody>

--- a/week-05/presentations/ppts/day-04-high-level-technical-modeling.pptx
+++ b/week-05/presentations/ppts/day-04-high-level-technical-modeling.pptx
@@ -5357,7 +5357,7 @@
             </a:pPr>
             <a:r>
               <a:rPr/>
-              <a:t>Pick from PRD Section 6 sad-path AC</a:t>
+              <a:t>Pick from Product Requirements Document (PRD) Section 6 sad-path AC</a:t>
             </a:r>
           </a:p>
           <a:p>
@@ -6387,7 +6387,7 @@
             </a:pPr>
             <a:r>
               <a:rPr/>
-              <a:t>TMD Section 4 drafted</a:t>
+              <a:t>Technical Modeling Document (TMD) Section 4 drafted</a:t>
             </a:r>
           </a:p>
           <a:p>
@@ -6606,7 +6606,7 @@
             </a:pPr>
             <a:r>
               <a:rPr/>
-              <a:t>Verify total latency annotation matches TCD Section 4 SLO budget</a:t>
+              <a:t>Verify total latency annotation matches Technical Concept Document (TCD) Section 4 Service Level Objective (SLO) budget</a:t>
             </a:r>
           </a:p>
           <a:p>
@@ -7239,7 +7239,7 @@
             </a:pPr>
             <a:r>
               <a:rPr/>
-              <a:t>Data structure (use ER diagram)</a:t>
+              <a:t>Data structure (use an entity-relationship / ER diagram)</a:t>
             </a:r>
           </a:p>
           <a:p>
@@ -7338,7 +7338,7 @@
             </a:pPr>
             <a:r>
               <a:rPr/>
-              <a:t>Weird path — edge case from your AC’s “weird” coverage (abbreviated)</a:t>
+              <a:t>Weird path — edge case from your acceptance criteria (AC) “weird” coverage (abbreviated)</a:t>
             </a:r>
           </a:p>
           <a:p>

--- a/week-05/presentations/ppts/day-04-high-level-technical-modeling.pptx
+++ b/week-05/presentations/ppts/day-04-high-level-technical-modeling.pptx
@@ -5748,6 +5748,52 @@
           </a:p>
         </p:txBody>
       </p:sp>
+      <p:sp>
+        <p:nvSpPr>
+          <p:cNvPr id="3" name="Content Placeholder 2"/>
+          <p:cNvSpPr>
+            <a:spLocks noGrp="1"/>
+          </p:cNvSpPr>
+          <p:nvPr>
+            <p:ph idx="1"/>
+          </p:nvPr>
+        </p:nvSpPr>
+        <p:spPr/>
+        <p:txBody>
+          <a:bodyPr/>
+          <a:lstStyle/>
+          <a:p>
+            <a:pPr lvl="0" indent="0">
+              <a:buNone/>
+            </a:pPr>
+            <a:r>
+              <a:rPr>
+                <a:latin typeface="Courier"/>
+              </a:rPr>
+              <a:t>Dispatcher    Mobile      API GW    Reconcile    Postgres
+│            │           │          │           │
+│ tap submit │           │          │           │
+│──────────▶│ POST ...  │          │           │
+│            │  Idempotency-Key: K1│          │           │
+│            │──────────▶│          │           │
+│            │           │──────────▶          │
+│            │           │          │ INSERT (commit)
+│            │           │          │──────────▶
+│            │           │          │ ◀── ok
+│            │           │ ◀── 201               │
+│            │  ✕ network drop                   │
+│ ◀──────────  user sees timeout                 │
+│ tap retry  │                                    │
+│──────────▶│ POST ... Idempotency-Key: K1 (same)│
+│            │──────────▶│ idempotency check     │
+│            │           │ → return cached 201   │
+│            │ ◀── 201                            │
+│ ◀──────────  modal closes; no duplicate        │
+Invariant: at most one ReconcileEvent per (Idempotency-Key) per 24h</a:t>
+            </a:r>
+          </a:p>
+        </p:txBody>
+      </p:sp>
     </p:spTree>
   </p:cSld>
 </p:sld>
@@ -6076,6 +6122,44 @@
             <a:r>
               <a:rPr/>
               <a:t>🤖 AI Critique Prompt</a:t>
+            </a:r>
+          </a:p>
+        </p:txBody>
+      </p:sp>
+      <p:sp>
+        <p:nvSpPr>
+          <p:cNvPr id="3" name="Content Placeholder 2"/>
+          <p:cNvSpPr>
+            <a:spLocks noGrp="1"/>
+          </p:cNvSpPr>
+          <p:nvPr>
+            <p:ph idx="1"/>
+          </p:nvPr>
+        </p:nvSpPr>
+        <p:spPr/>
+        <p:txBody>
+          <a:bodyPr/>
+          <a:lstStyle/>
+          <a:p>
+            <a:pPr lvl="0" indent="0">
+              <a:buNone/>
+            </a:pPr>
+            <a:r>
+              <a:rPr>
+                <a:latin typeface="Courier"/>
+              </a:rPr>
+              <a:t>Role: Engineering reviewer with strong sequence-diagram instincts.
+Context: &lt;plain-text descriptions of the three sequence diagrams,
+including all lifelines, arrows, protocols, latencies,
+and annotations&gt;
+Task: Identify what's missing, ranked by importance:
+1. What sad/weird paths are NOT yet diagrammed but should be?
+2. What arrow is missing from the happy path?
+3. What invariant should be added to the weird path that isn't?
+Constraints:
+- Do not invent technologies
+- Be specific
+Format: Three sections; ranked items in each.</a:t>
             </a:r>
           </a:p>
         </p:txBody>

--- a/week-05/presentations/ppts/day-04-high-level-technical-modeling.pptx
+++ b/week-05/presentations/ppts/day-04-high-level-technical-modeling.pptx
@@ -791,7 +791,7 @@
             </a:pPr>
             <a:r>
               <a:rPr/>
-              <a:t>A weird path without a named invariant isn’t designed — it’s hoped. Push triads to state the invariant out loud before they call the diagram done.</a:t>
+              <a:t>A weird path without a named invariant isn’t designed — it’s hoped. Push quads to state the invariant out loud before they call the diagram done.</a:t>
             </a:r>
           </a:p>
         </p:txBody>
@@ -873,7 +873,7 @@
             </a:pPr>
             <a:r>
               <a:rPr/>
-              <a:t>If a triad can’t name the invariant, the weird-path design isn’t done.</a:t>
+              <a:t>If a quad can’t name the invariant, the weird-path design isn’t done.</a:t>
             </a:r>
           </a:p>
         </p:txBody>
@@ -1037,7 +1037,7 @@
             </a:pPr>
             <a:r>
               <a:rPr/>
-              <a:t>Push for the invariant. Triads who can’t name it haven’t designed the weird path.</a:t>
+              <a:t>Push for the invariant. Quads who can’t name it haven’t designed the weird path.</a:t>
             </a:r>
           </a:p>
         </p:txBody>
@@ -1447,7 +1447,7 @@
             </a:pPr>
             <a:r>
               <a:rPr/>
-              <a:t>By 16:00, every triad has TMD Section 4 with three sequence diagrams.</a:t>
+              <a:t>By 16:00, every quad has TMD Section 4 with three sequence diagrams.</a:t>
             </a:r>
           </a:p>
         </p:txBody>
@@ -1775,7 +1775,7 @@
             </a:pPr>
             <a:r>
               <a:rPr/>
-              <a:t>Start with the happy path so triads internalize the diagram grammar. Watch for missing audit-publish arrows — a common compliance miss.</a:t>
+              <a:t>Start with the happy path so quads internalize the diagram grammar. Watch for missing audit-publish arrows — a common compliance miss.</a:t>
             </a:r>
           </a:p>
         </p:txBody>
@@ -1857,7 +1857,7 @@
             </a:pPr>
             <a:r>
               <a:rPr/>
-              <a:t>If a triad’s diagram has 25 lifelines, push them to merge or simplify.</a:t>
+              <a:t>If a quad’s diagram has 25 lifelines, push them to merge or simplify.</a:t>
             </a:r>
           </a:p>
         </p:txBody>
@@ -1939,7 +1939,7 @@
             </a:pPr>
             <a:r>
               <a:rPr/>
-              <a:t>Triads who try to draw “the whole system” in one sequence diagram drown. Coach to one user action.</a:t>
+              <a:t>Quads who try to draw “the whole system” in one sequence diagram drown. Coach to one user action.</a:t>
             </a:r>
           </a:p>
         </p:txBody>
@@ -5468,7 +5468,7 @@
             </a:pPr>
             <a:r>
               <a:rPr b="1"/>
-              <a:t>Triads • 40 minutes</a:t>
+              <a:t>Quads • 40 minutes</a:t>
             </a:r>
           </a:p>
           <a:p>
@@ -5864,7 +5864,7 @@
             </a:pPr>
             <a:r>
               <a:rPr b="1"/>
-              <a:t>Triads • 40 minutes</a:t>
+              <a:t>Quads • 40 minutes</a:t>
             </a:r>
           </a:p>
           <a:p>
@@ -5900,7 +5900,7 @@
             </a:pPr>
             <a:r>
               <a:rPr/>
-              <a:t>5 min: walk to another triad</a:t>
+              <a:t>5 min: walk to another quad</a:t>
             </a:r>
           </a:p>
           <a:p>
@@ -6309,7 +6309,7 @@
             </a:pPr>
             <a:r>
               <a:rPr b="1"/>
-              <a:t>Triad pairs • 45 minutes • Wrap</a:t>
+              <a:t>Quad pairs • 45 minutes • Wrap</a:t>
             </a:r>
           </a:p>
           <a:p>
@@ -6699,7 +6699,7 @@
             </a:pPr>
             <a:r>
               <a:rPr/>
-              <a:t>Cross-review with another triad and use AI to surface gaps</a:t>
+              <a:t>Cross-review with another quad and use AI to surface gaps</a:t>
             </a:r>
           </a:p>
         </p:txBody>
@@ -7506,7 +7506,7 @@
             </a:pPr>
             <a:r>
               <a:rPr b="1"/>
-              <a:t>Triads • 35 minutes</a:t>
+              <a:t>Quads • 35 minutes</a:t>
             </a:r>
           </a:p>
           <a:p>
@@ -7551,7 +7551,7 @@
             </a:pPr>
             <a:r>
               <a:rPr/>
-              <a:t>5 min: 60-sec walk to another triad</a:t>
+              <a:t>5 min: 60-sec walk to another quad</a:t>
             </a:r>
           </a:p>
           <a:p>

--- a/week-05/presentations/ppts/day-04-high-level-technical-modeling.pptx
+++ b/week-05/presentations/ppts/day-04-high-level-technical-modeling.pptx
@@ -5468,7 +5468,7 @@
             </a:pPr>
             <a:r>
               <a:rPr b="1"/>
-              <a:t>Quads • 40 minutes</a:t>
+              <a:t>Quads • 50 minutes</a:t>
             </a:r>
           </a:p>
           <a:p>
@@ -5864,7 +5864,7 @@
             </a:pPr>
             <a:r>
               <a:rPr b="1"/>
-              <a:t>Quads • 40 minutes</a:t>
+              <a:t>Quads • 50 minutes</a:t>
             </a:r>
           </a:p>
           <a:p>
@@ -6309,7 +6309,7 @@
             </a:pPr>
             <a:r>
               <a:rPr b="1"/>
-              <a:t>Quad pairs • 45 minutes • Wrap</a:t>
+              <a:t>Quad pairs • 55 minutes • Wrap</a:t>
             </a:r>
           </a:p>
           <a:p>
@@ -7506,7 +7506,7 @@
             </a:pPr>
             <a:r>
               <a:rPr b="1"/>
-              <a:t>Quads • 35 minutes</a:t>
+              <a:t>Quads • 45 minutes</a:t>
             </a:r>
           </a:p>
           <a:p>

--- a/week-05/presentations/ppts/day-04-high-level-technical-modeling.pptx
+++ b/week-05/presentations/ppts/day-04-high-level-technical-modeling.pptx
@@ -5486,7 +5486,7 @@
             </a:pPr>
             <a:r>
               <a:rPr/>
-              <a:t>20 min: draw the divergence</a:t>
+              <a:t>30 min: draw the divergence</a:t>
             </a:r>
           </a:p>
           <a:p>
@@ -5522,7 +5522,7 @@
             </a:pPr>
             <a:r>
               <a:rPr/>
-              <a:t>⏱ 5 + 20 + 5 + 5 + 5</a:t>
+              <a:t>⏱ 5 + 30 + 5 + 5 + 5</a:t>
             </a:r>
           </a:p>
         </p:txBody>
@@ -5882,7 +5882,7 @@
             </a:pPr>
             <a:r>
               <a:rPr/>
-              <a:t>25 min: draw divergence + recovery</a:t>
+              <a:t>35 min: draw divergence + recovery</a:t>
             </a:r>
           </a:p>
           <a:p>
@@ -5909,7 +5909,7 @@
             </a:pPr>
             <a:r>
               <a:rPr/>
-              <a:t>⏱ 5 + 25 + 5 + 5</a:t>
+              <a:t>⏱ 5 + 35 + 5 + 5</a:t>
             </a:r>
           </a:p>
         </p:txBody>
@@ -6318,7 +6318,7 @@
             </a:pPr>
             <a:r>
               <a:rPr/>
-              <a:t>20 min: cross-review with 3 questions</a:t>
+              <a:t>30 min: cross-review with 3 questions</a:t>
             </a:r>
           </a:p>
           <a:p>
@@ -6354,7 +6354,7 @@
             </a:pPr>
             <a:r>
               <a:rPr/>
-              <a:t>⏱ 20 + 10 + 10 + 5 · 15-min wrap</a:t>
+              <a:t>⏱ 30 + 10 + 10 + 5 · 15-min wrap</a:t>
             </a:r>
           </a:p>
         </p:txBody>
@@ -7533,7 +7533,7 @@
             </a:pPr>
             <a:r>
               <a:rPr/>
-              <a:t>15 min: draw messages with protocol labels</a:t>
+              <a:t>25 min: draw messages with protocol labels</a:t>
             </a:r>
           </a:p>
           <a:p>
@@ -7560,7 +7560,7 @@
             </a:pPr>
             <a:r>
               <a:rPr/>
-              <a:t>⏱ 5 + 5 + 15 + 5 + 5</a:t>
+              <a:t>⏱ 5 + 5 + 25 + 5 + 5</a:t>
             </a:r>
           </a:p>
         </p:txBody>
